--- a/lab_12-symposium/lab_12-symposium.pptx
+++ b/lab_12-symposium/lab_12-symposium.pptx
@@ -201,7 +201,7 @@
           <a:p>
             <a:fld id="{81C4B3FE-0320-8142-8396-5C3025C019EC}" type="datetimeFigureOut">
               <a:rPr lang="en-IT" smtClean="0"/>
-              <a:t>5/16/24</a:t>
+              <a:t>5/27/25</a:t>
             </a:fld>
             <a:endParaRPr lang="en-IT"/>
           </a:p>
@@ -1587,7 +1587,9 @@
           <a:lstStyle>
             <a:lvl1pPr marL="0" indent="0" algn="ctr">
               <a:buNone/>
-              <a:defRPr sz="4800" b="1"/>
+              <a:defRPr sz="4800" b="1">
+                <a:latin typeface="Aptos" panose="020B0004020202020204" pitchFamily="34" charset="0"/>
+              </a:defRPr>
             </a:lvl1pPr>
             <a:lvl2pPr marL="457200" indent="0" algn="ctr">
               <a:buNone/>
@@ -1673,7 +1675,9 @@
           <a:lstStyle/>
           <a:p>
             <a:pPr algn="ctr"/>
-            <a:endParaRPr lang="en-GB" dirty="0"/>
+            <a:endParaRPr lang="en-GB" dirty="0">
+              <a:latin typeface="Aptos" panose="020B0004020202020204" pitchFamily="34" charset="0"/>
+            </a:endParaRPr>
           </a:p>
         </p:txBody>
       </p:sp>
@@ -1723,7 +1727,9 @@
           <a:lstStyle/>
           <a:p>
             <a:pPr algn="ctr"/>
-            <a:endParaRPr lang="en-GB" dirty="0"/>
+            <a:endParaRPr lang="en-GB" dirty="0">
+              <a:latin typeface="Aptos" panose="020B0004020202020204" pitchFamily="34" charset="0"/>
+            </a:endParaRPr>
           </a:p>
         </p:txBody>
       </p:sp>
@@ -1769,36 +1775,52 @@
           </a:lstStyle>
           <a:p>
             <a:r>
-              <a:rPr lang="it-IT" sz="2800" b="0" dirty="0" err="1"/>
+              <a:rPr lang="it-IT" sz="2800" b="0" dirty="0" err="1">
+                <a:latin typeface="Aptos" panose="020B0004020202020204" pitchFamily="34" charset="0"/>
+              </a:rPr>
               <a:t>Biomedical</a:t>
             </a:r>
             <a:r>
-              <a:rPr lang="it-IT" sz="2800" b="0" dirty="0"/>
+              <a:rPr lang="it-IT" sz="2800" b="0" dirty="0">
+                <a:latin typeface="Aptos" panose="020B0004020202020204" pitchFamily="34" charset="0"/>
+              </a:rPr>
               <a:t> </a:t>
             </a:r>
             <a:r>
-              <a:rPr lang="it-IT" sz="2800" b="0" dirty="0" err="1"/>
+              <a:rPr lang="it-IT" sz="2800" b="0" dirty="0" err="1">
+                <a:latin typeface="Aptos" panose="020B0004020202020204" pitchFamily="34" charset="0"/>
+              </a:rPr>
               <a:t>Wearable</a:t>
             </a:r>
             <a:r>
-              <a:rPr lang="it-IT" sz="2800" b="0" dirty="0"/>
+              <a:rPr lang="it-IT" sz="2800" b="0" dirty="0">
+                <a:latin typeface="Aptos" panose="020B0004020202020204" pitchFamily="34" charset="0"/>
+              </a:rPr>
               <a:t> Technologies </a:t>
             </a:r>
           </a:p>
           <a:p>
             <a:r>
-              <a:rPr lang="it-IT" sz="2800" b="0" dirty="0"/>
+              <a:rPr lang="it-IT" sz="2800" b="0" dirty="0">
+                <a:latin typeface="Aptos" panose="020B0004020202020204" pitchFamily="34" charset="0"/>
+              </a:rPr>
               <a:t>for Healthcare and </a:t>
             </a:r>
             <a:r>
-              <a:rPr lang="it-IT" sz="2800" b="0" dirty="0" err="1"/>
+              <a:rPr lang="it-IT" sz="2800" b="0" dirty="0" err="1">
+                <a:latin typeface="Aptos" panose="020B0004020202020204" pitchFamily="34" charset="0"/>
+              </a:rPr>
               <a:t>Wellbeing</a:t>
             </a:r>
             <a:r>
-              <a:rPr lang="it-IT" sz="2800" b="0" dirty="0"/>
+              <a:rPr lang="it-IT" sz="2800" b="0" dirty="0">
+                <a:latin typeface="Aptos" panose="020B0004020202020204" pitchFamily="34" charset="0"/>
+              </a:rPr>
               <a:t>  </a:t>
             </a:r>
-            <a:endParaRPr lang="en-GB" sz="2800" b="0" dirty="0"/>
+            <a:endParaRPr lang="en-GB" sz="2800" b="0" dirty="0">
+              <a:latin typeface="Aptos" panose="020B0004020202020204" pitchFamily="34" charset="0"/>
+            </a:endParaRPr>
           </a:p>
         </p:txBody>
       </p:sp>
@@ -1849,8 +1871,10 @@
               </a:spcAft>
             </a:pPr>
             <a:r>
-              <a:rPr lang="it-IT" sz="2800" dirty="0"/>
-              <a:t>A.Y. 2023-2024</a:t>
+              <a:rPr lang="it-IT" sz="2800" dirty="0">
+                <a:latin typeface="Aptos" panose="020B0004020202020204" pitchFamily="34" charset="0"/>
+              </a:rPr>
+              <a:t>A.Y. 2024-2025</a:t>
             </a:r>
           </a:p>
         </p:txBody>
@@ -1889,7 +1913,7 @@
                 <a:effectLst/>
                 <a:uLnTx/>
                 <a:uFillTx/>
-                <a:latin typeface="Palatino Linotype" panose="02040502050505030304" pitchFamily="18" charset="0"/>
+                <a:latin typeface="Aptos" panose="020B0004020202020204" pitchFamily="34" charset="0"/>
                 <a:ea typeface="+mj-ea"/>
                 <a:cs typeface="+mj-cs"/>
               </a:rPr>
@@ -1906,7 +1930,7 @@
                 <a:effectLst/>
                 <a:uLnTx/>
                 <a:uFillTx/>
-                <a:latin typeface="Palatino Linotype" panose="02040502050505030304" pitchFamily="18" charset="0"/>
+                <a:latin typeface="Aptos" panose="020B0004020202020204" pitchFamily="34" charset="0"/>
                 <a:ea typeface="+mj-ea"/>
                 <a:cs typeface="+mj-cs"/>
               </a:rPr>
@@ -1923,7 +1947,7 @@
                 <a:effectLst/>
                 <a:uLnTx/>
                 <a:uFillTx/>
-                <a:latin typeface="Palatino Linotype" panose="02040502050505030304" pitchFamily="18" charset="0"/>
+                <a:latin typeface="Aptos" panose="020B0004020202020204" pitchFamily="34" charset="0"/>
                 <a:ea typeface="+mj-ea"/>
                 <a:cs typeface="+mj-cs"/>
               </a:rPr>
@@ -1939,7 +1963,7 @@
                 <a:effectLst/>
                 <a:uLnTx/>
                 <a:uFillTx/>
-                <a:latin typeface="Palatino Linotype" panose="02040502050505030304" pitchFamily="18" charset="0"/>
+                <a:latin typeface="Aptos" panose="020B0004020202020204" pitchFamily="34" charset="0"/>
                 <a:ea typeface="+mj-ea"/>
                 <a:cs typeface="+mj-cs"/>
               </a:rPr>
@@ -1956,7 +1980,7 @@
                 <a:effectLst/>
                 <a:uLnTx/>
                 <a:uFillTx/>
-                <a:latin typeface="Palatino Linotype" panose="02040502050505030304" pitchFamily="18" charset="0"/>
+                <a:latin typeface="Aptos" panose="020B0004020202020204" pitchFamily="34" charset="0"/>
                 <a:ea typeface="+mj-ea"/>
                 <a:cs typeface="+mj-cs"/>
               </a:rPr>
@@ -1973,13 +1997,15 @@
                 <a:effectLst/>
                 <a:uLnTx/>
                 <a:uFillTx/>
-                <a:latin typeface="Palatino Linotype" panose="02040502050505030304" pitchFamily="18" charset="0"/>
+                <a:latin typeface="Aptos" panose="020B0004020202020204" pitchFamily="34" charset="0"/>
                 <a:ea typeface="+mj-ea"/>
                 <a:cs typeface="+mj-cs"/>
               </a:rPr>
               <a:t>Engineering</a:t>
             </a:r>
-            <a:endParaRPr lang="en-GB" sz="1100" cap="small" baseline="0" dirty="0"/>
+            <a:endParaRPr lang="en-GB" sz="1100" cap="small" baseline="0" dirty="0">
+              <a:latin typeface="Aptos" panose="020B0004020202020204" pitchFamily="34" charset="0"/>
+            </a:endParaRPr>
           </a:p>
         </p:txBody>
       </p:sp>
@@ -2089,7 +2115,9 @@
           </a:bodyPr>
           <a:lstStyle>
             <a:lvl1pPr>
-              <a:defRPr sz="3200"/>
+              <a:defRPr sz="3200">
+                <a:latin typeface="Aptos" panose="020B0004020202020204" pitchFamily="34" charset="0"/>
+              </a:defRPr>
             </a:lvl1pPr>
           </a:lstStyle>
           <a:p>
@@ -2489,12 +2517,14 @@
                     <a:tint val="75000"/>
                   </a:schemeClr>
                 </a:solidFill>
+                <a:latin typeface="Aptos" panose="020B0004020202020204" pitchFamily="34" charset="0"/>
               </a:defRPr>
             </a:lvl1pPr>
           </a:lstStyle>
           <a:p>
             <a:fld id="{31DE2C5B-556E-47B8-A792-024C2FCA4ACC}" type="slidenum">
               <a:rPr lang="en-GB" smtClean="0"/>
+              <a:pPr/>
               <a:t>‹#›</a:t>
             </a:fld>
             <a:endParaRPr lang="en-GB"/>
@@ -2529,7 +2559,7 @@
           <a:solidFill>
             <a:schemeClr val="tx1"/>
           </a:solidFill>
-          <a:latin typeface="Palatino Linotype" panose="02040502050505030304" pitchFamily="18" charset="0"/>
+          <a:latin typeface="Aptos" panose="020B0004020202020204" pitchFamily="34" charset="0"/>
           <a:ea typeface="+mj-ea"/>
           <a:cs typeface="+mj-cs"/>
         </a:defRPr>
@@ -2552,7 +2582,7 @@
           <a:solidFill>
             <a:schemeClr val="tx1"/>
           </a:solidFill>
-          <a:latin typeface="Palatino Linotype" panose="02040502050505030304" pitchFamily="18" charset="0"/>
+          <a:latin typeface="Aptos" panose="020B0004020202020204" pitchFamily="34" charset="0"/>
           <a:ea typeface="+mn-ea"/>
           <a:cs typeface="+mn-cs"/>
         </a:defRPr>
@@ -2573,7 +2603,7 @@
           <a:solidFill>
             <a:schemeClr val="tx1"/>
           </a:solidFill>
-          <a:latin typeface="Palatino Linotype" panose="02040502050505030304" pitchFamily="18" charset="0"/>
+          <a:latin typeface="Aptos" panose="020B0004020202020204" pitchFamily="34" charset="0"/>
           <a:ea typeface="+mn-ea"/>
           <a:cs typeface="+mn-cs"/>
         </a:defRPr>
@@ -2594,7 +2624,7 @@
           <a:solidFill>
             <a:schemeClr val="tx1"/>
           </a:solidFill>
-          <a:latin typeface="Palatino Linotype" panose="02040502050505030304" pitchFamily="18" charset="0"/>
+          <a:latin typeface="Aptos" panose="020B0004020202020204" pitchFamily="34" charset="0"/>
           <a:ea typeface="+mn-ea"/>
           <a:cs typeface="+mn-cs"/>
         </a:defRPr>
@@ -2615,7 +2645,7 @@
           <a:solidFill>
             <a:schemeClr val="tx1"/>
           </a:solidFill>
-          <a:latin typeface="Palatino Linotype" panose="02040502050505030304" pitchFamily="18" charset="0"/>
+          <a:latin typeface="Aptos" panose="020B0004020202020204" pitchFamily="34" charset="0"/>
           <a:ea typeface="+mn-ea"/>
           <a:cs typeface="+mn-cs"/>
         </a:defRPr>
@@ -2636,7 +2666,7 @@
           <a:solidFill>
             <a:schemeClr val="tx1"/>
           </a:solidFill>
-          <a:latin typeface="Palatino Linotype" panose="02040502050505030304" pitchFamily="18" charset="0"/>
+          <a:latin typeface="Aptos" panose="020B0004020202020204" pitchFamily="34" charset="0"/>
           <a:ea typeface="+mn-ea"/>
           <a:cs typeface="+mn-cs"/>
         </a:defRPr>
@@ -3309,7 +3339,9 @@
               <a:buNone/>
             </a:pPr>
             <a:r>
-              <a:rPr lang="en-US" b="1" dirty="0"/>
+              <a:rPr lang="en-US" b="1" dirty="0">
+                <a:latin typeface="Aptos" panose="020B0004020202020204" pitchFamily="34" charset="0"/>
+              </a:rPr>
               <a:t>iPhone 15</a:t>
             </a:r>
           </a:p>
@@ -3318,29 +3350,39 @@
               <a:buFont typeface="Wingdings" panose="05000000000000000000" pitchFamily="2" charset="2"/>
               <a:buNone/>
             </a:pPr>
-            <a:endParaRPr lang="en-US" dirty="0"/>
-          </a:p>
-          <a:p>
-            <a:r>
-              <a:rPr lang="en-US" dirty="0"/>
+            <a:endParaRPr lang="en-US" dirty="0">
+              <a:latin typeface="Aptos" panose="020B0004020202020204" pitchFamily="34" charset="0"/>
+            </a:endParaRPr>
+          </a:p>
+          <a:p>
+            <a:r>
+              <a:rPr lang="en-US" dirty="0">
+                <a:latin typeface="Aptos" panose="020B0004020202020204" pitchFamily="34" charset="0"/>
+              </a:rPr>
               <a:t>Hosts a custom app that communicates with Polar H10</a:t>
             </a:r>
           </a:p>
           <a:p>
             <a:r>
-              <a:rPr lang="en-US" dirty="0"/>
+              <a:rPr lang="en-US" dirty="0">
+                <a:latin typeface="Aptos" panose="020B0004020202020204" pitchFamily="34" charset="0"/>
+              </a:rPr>
               <a:t>Collects and export data </a:t>
             </a:r>
           </a:p>
           <a:p>
-            <a:endParaRPr lang="en-US" dirty="0"/>
+            <a:endParaRPr lang="en-US" dirty="0">
+              <a:latin typeface="Aptos" panose="020B0004020202020204" pitchFamily="34" charset="0"/>
+            </a:endParaRPr>
           </a:p>
           <a:p>
             <a:pPr marL="0" indent="0">
               <a:buFont typeface="Wingdings" panose="05000000000000000000" pitchFamily="2" charset="2"/>
               <a:buNone/>
             </a:pPr>
-            <a:endParaRPr lang="en-US" dirty="0"/>
+            <a:endParaRPr lang="en-US" dirty="0">
+              <a:latin typeface="Aptos" panose="020B0004020202020204" pitchFamily="34" charset="0"/>
+            </a:endParaRPr>
           </a:p>
         </p:txBody>
       </p:sp>
@@ -3457,13 +3499,19 @@
           <a:p>
             <a:r>
               <a:rPr lang="en-US" dirty="0"/>
-              <a:t>5 volunteers wearing 1 x Polar H10 + 1x iPhone (need their Age and BW)</a:t>
+              <a:t>3 volunteers wearing 1 x Polar H10 + 1x iPhone (need their Age and BW)</a:t>
             </a:r>
           </a:p>
           <a:p>
             <a:r>
               <a:rPr lang="en-US" dirty="0"/>
-              <a:t>2 laps of the DEI “main” building walking as fast as possible</a:t>
+              <a:t>Measure heart rate at rest</a:t>
+            </a:r>
+          </a:p>
+          <a:p>
+            <a:r>
+              <a:rPr lang="en-US" dirty="0"/>
+              <a:t>2 laps of the DEI “main” building running (or walking as fast as possible)</a:t>
             </a:r>
           </a:p>
           <a:p>
@@ -3561,7 +3609,7 @@
         </p:blipFill>
         <p:spPr>
           <a:xfrm>
-            <a:off x="3444440" y="3207894"/>
+            <a:off x="3539440" y="3255394"/>
             <a:ext cx="2514060" cy="3426241"/>
           </a:xfrm>
           <a:prstGeom prst="rect">
@@ -3583,7 +3631,7 @@
         </p:nvSpPr>
         <p:spPr>
           <a:xfrm rot="631478">
-            <a:off x="5486441" y="3613554"/>
+            <a:off x="5581441" y="3661054"/>
             <a:ext cx="328863" cy="3015916"/>
           </a:xfrm>
           <a:prstGeom prst="downArrow">
@@ -3637,7 +3685,7 @@
         </p:nvSpPr>
         <p:spPr>
           <a:xfrm rot="11479313">
-            <a:off x="3541200" y="3269008"/>
+            <a:off x="3636200" y="3316508"/>
             <a:ext cx="328863" cy="3015916"/>
           </a:xfrm>
           <a:prstGeom prst="downArrow">
@@ -3691,7 +3739,7 @@
         </p:nvSpPr>
         <p:spPr>
           <a:xfrm rot="5956526">
-            <a:off x="4195508" y="5607172"/>
+            <a:off x="4290508" y="5654672"/>
             <a:ext cx="328863" cy="1801546"/>
           </a:xfrm>
           <a:prstGeom prst="downArrow">
@@ -3745,7 +3793,7 @@
         </p:nvSpPr>
         <p:spPr>
           <a:xfrm rot="16768234">
-            <a:off x="4806690" y="2427697"/>
+            <a:off x="4901690" y="2475197"/>
             <a:ext cx="328863" cy="1801546"/>
           </a:xfrm>
           <a:prstGeom prst="downArrow">
@@ -3799,7 +3847,7 @@
         </p:nvSpPr>
         <p:spPr>
           <a:xfrm>
-            <a:off x="5787853" y="3343103"/>
+            <a:off x="5882853" y="3390603"/>
             <a:ext cx="320842" cy="301110"/>
           </a:xfrm>
           <a:prstGeom prst="ellipse">
@@ -3854,7 +3902,7 @@
         </p:nvSpPr>
         <p:spPr>
           <a:xfrm>
-            <a:off x="5591949" y="3487261"/>
+            <a:off x="5686949" y="3534761"/>
             <a:ext cx="905854" cy="1052705"/>
           </a:xfrm>
           <a:prstGeom prst="arc">
@@ -3914,7 +3962,7 @@
           <a:p>
             <a:r>
               <a:rPr lang="en-US" dirty="0">
-                <a:latin typeface="Palatino Linotype" panose="02040502050505030304" pitchFamily="18" charset="0"/>
+                <a:latin typeface="Aptos" panose="020B0004020202020204" pitchFamily="34" charset="0"/>
               </a:rPr>
               <a:t>Start/Stop</a:t>
             </a:r>
@@ -4188,87 +4236,19 @@
           </a:lstStyle>
           <a:p>
             <a:r>
-              <a:rPr lang="en-US" dirty="0"/>
-              <a:t>Rank the 5 subjects by cardiovascular health evaluated according to their estimated VO2</a:t>
-            </a:r>
-            <a:r>
-              <a:rPr lang="en-US" baseline="-25000" dirty="0"/>
-              <a:t>MAX </a:t>
-            </a:r>
-            <a:r>
-              <a:rPr lang="en-US" dirty="0"/>
-              <a:t>calculated from the recorded heart rate </a:t>
-            </a:r>
-            <a:endParaRPr lang="en-US" baseline="-25000" dirty="0"/>
-          </a:p>
-          <a:p>
-            <a:endParaRPr lang="en-US" baseline="-25000" dirty="0"/>
-          </a:p>
-          <a:p>
-            <a:r>
-              <a:rPr lang="en-US" dirty="0"/>
-              <a:t>VO2</a:t>
-            </a:r>
-            <a:r>
-              <a:rPr lang="en-US" baseline="-25000" dirty="0"/>
-              <a:t>MAX </a:t>
-            </a:r>
-            <a:r>
-              <a:rPr lang="en-US" dirty="0"/>
-              <a:t>is the </a:t>
-            </a:r>
-            <a:r>
-              <a:rPr lang="en-US" sz="2400" b="0" dirty="0">
-                <a:latin typeface="Palatino Linotype" panose="02040502050505030304" pitchFamily="18" charset="0"/>
+              <a:rPr lang="en-US" dirty="0">
+                <a:latin typeface="Aptos" panose="020B0004020202020204" pitchFamily="34" charset="0"/>
               </a:rPr>
-              <a:t>maximum </a:t>
-            </a:r>
-          </a:p>
-          <a:p>
-            <a:pPr marL="0" indent="0">
-              <a:buNone/>
-            </a:pPr>
-            <a:r>
-              <a:rPr lang="en-US" sz="2400" b="0" dirty="0">
-                <a:latin typeface="Palatino Linotype" panose="02040502050505030304" pitchFamily="18" charset="0"/>
-              </a:rPr>
-              <a:t>oxygen volume a subject can</a:t>
-            </a:r>
-          </a:p>
-          <a:p>
-            <a:pPr marL="0" indent="0">
-              <a:buNone/>
-            </a:pPr>
-            <a:r>
-              <a:rPr lang="en-US" sz="2400" b="0" dirty="0">
-                <a:latin typeface="Palatino Linotype" panose="02040502050505030304" pitchFamily="18" charset="0"/>
-              </a:rPr>
-              <a:t>consume per min (l/min</a:t>
-            </a:r>
-            <a:r>
-              <a:rPr lang="en-US" sz="2400" b="0">
-                <a:latin typeface="Palatino Linotype" panose="02040502050505030304" pitchFamily="18" charset="0"/>
-              </a:rPr>
-              <a:t>)</a:t>
-            </a:r>
-            <a:r>
-              <a:rPr lang="en-US">
-                <a:latin typeface="Palatino Linotype" panose="02040502050505030304" pitchFamily="18" charset="0"/>
-              </a:rPr>
-              <a:t>. </a:t>
-            </a:r>
-          </a:p>
-          <a:p>
-            <a:pPr marL="0" indent="0">
-              <a:buNone/>
-            </a:pPr>
-            <a:endParaRPr lang="en-US" sz="2400" b="0" dirty="0"/>
-          </a:p>
-          <a:p>
-            <a:endParaRPr lang="en-US" baseline="-25000" dirty="0"/>
-          </a:p>
-          <a:p>
-            <a:endParaRPr lang="en-US" baseline="-25000" dirty="0"/>
+              <a:t>Quantify and rank the activity “load” experienced by each participant</a:t>
+            </a:r>
+            <a:endParaRPr lang="en-US" baseline="-25000" dirty="0">
+              <a:latin typeface="Aptos" panose="020B0004020202020204" pitchFamily="34" charset="0"/>
+            </a:endParaRPr>
+          </a:p>
+          <a:p>
+            <a:endParaRPr lang="en-US" baseline="-25000" dirty="0">
+              <a:latin typeface="Aptos" panose="020B0004020202020204" pitchFamily="34" charset="0"/>
+            </a:endParaRPr>
           </a:p>
         </p:txBody>
       </p:sp>
@@ -4589,24 +4569,32 @@
               <a:buNone/>
             </a:pPr>
             <a:r>
-              <a:rPr lang="en-US" dirty="0"/>
-              <a:t>5 .csv files containing </a:t>
-            </a:r>
-          </a:p>
-          <a:p>
-            <a:r>
-              <a:rPr lang="en-US" dirty="0"/>
+              <a:rPr lang="en-US" dirty="0">
+                <a:latin typeface="Aptos" panose="020B0004020202020204" pitchFamily="34" charset="0"/>
+              </a:rPr>
+              <a:t>3 .csv files containing </a:t>
+            </a:r>
+          </a:p>
+          <a:p>
+            <a:r>
+              <a:rPr lang="en-US" dirty="0">
+                <a:latin typeface="Aptos" panose="020B0004020202020204" pitchFamily="34" charset="0"/>
+              </a:rPr>
               <a:t>time from start (s)</a:t>
             </a:r>
           </a:p>
           <a:p>
             <a:r>
-              <a:rPr lang="en-US" dirty="0"/>
+              <a:rPr lang="en-US" dirty="0">
+                <a:latin typeface="Aptos" panose="020B0004020202020204" pitchFamily="34" charset="0"/>
+              </a:rPr>
               <a:t>heart rate at given time (bpm)</a:t>
             </a:r>
           </a:p>
           <a:p>
-            <a:endParaRPr lang="en-US" dirty="0"/>
+            <a:endParaRPr lang="en-US" dirty="0">
+              <a:latin typeface="Aptos" panose="020B0004020202020204" pitchFamily="34" charset="0"/>
+            </a:endParaRPr>
           </a:p>
         </p:txBody>
       </p:sp>
